--- a/patent/truthprint-patent-20260723.pptx
+++ b/patent/truthprint-patent-20260723.pptx
@@ -3937,7 +3937,7 @@
                 <a:ea typeface="Malgun Gothic" pitchFamily="34" charset="-122"/>
                 <a:cs typeface="Malgun Gothic" pitchFamily="34" charset="-120"/>
               </a:rPr>
-              <a:t>표현이 바뀌어도 의미 기반 신호가 유지되어 종래 토큰 방식의 취약성을 해소</a:t>
+              <a:t>표현이 바뀌어도 의미 기반 신호 유지 — Stage-1 실측: 번역 시 토큰 방식 TPR 0.00–0.02로 붕괴, 본 발명은 ≈1.00 생존</a:t>
             </a:r>
             <a:endParaRPr lang="en-US" sz="1300" dirty="0"/>
           </a:p>
@@ -5133,7 +5133,7 @@
                 <a:ea typeface="Malgun Gothic" pitchFamily="34" charset="-122"/>
                 <a:cs typeface="Malgun Gothic" pitchFamily="34" charset="-120"/>
               </a:rPr>
-              <a:t>번역·패러프레이즈에 취약</a:t>
+              <a:t>번역에 취약 (실측 TPR 0.00–0.02)</a:t>
             </a:r>
             <a:endParaRPr lang="en-US" sz="1250" dirty="0"/>
           </a:p>
@@ -5197,7 +5197,7 @@
                 <a:ea typeface="Malgun Gothic" pitchFamily="34" charset="-122"/>
                 <a:cs typeface="Malgun Gothic" pitchFamily="34" charset="-120"/>
               </a:rPr>
-              <a:t>의미보존 변형에 강건(분산+ECC+소거)</a:t>
+              <a:t>의미보존 변형에 강건 (분산+ECC+소거; 실측 번역 TPR ≈1.00)</a:t>
             </a:r>
             <a:endParaRPr lang="en-US" sz="1250" dirty="0"/>
           </a:p>
@@ -5645,7 +5645,7 @@
                 <a:ea typeface="Malgun Gothic" pitchFamily="34" charset="-122"/>
                 <a:cs typeface="Malgun Gothic" pitchFamily="34" charset="-120"/>
               </a:rPr>
-              <a:t>진보성 요지: ‘무엇을 보존해야 하는가’를 타입 계약으로 기계검증하고, 인증 페이로드를 불변식에 결속하는 구성은 종래에 없던 기술적 특징이다.</a:t>
+              <a:t>진보성 요지: ‘무엇을 보존해야 하는가’를 타입 계약으로 기계검증하고, 인증 페이로드를 불변식에 결속하는 구성은 종래에 없던 기술적 특징이다. Stage-1 참조구현 실측(베이스라인 4종 대비)이 이를 뒷받침한다 — 종래 토큰 방식은 번역에서 붕괴, 본 발명은 유지·인증.</a:t>
             </a:r>
             <a:endParaRPr lang="en-US" sz="1350" dirty="0"/>
           </a:p>
